--- a/slide/pptx/P10-Sensor-Aktuator-Datasheet.pptx
+++ b/slide/pptx/P10-Sensor-Aktuator-Datasheet.pptx
@@ -131,21 +131,21 @@
   <p:extLst>
     <p:ext uri="{521415D9-36F7-43E2-AB2F-B90AF26B5E84}">
       <p14:sectionLst xmlns:p14="http://schemas.microsoft.com/office/powerpoint/2010/main">
-        <p14:section name="Pembuka" id="{fb38bd12-d1fb-fdda-4ca8-ba5aebd2d405}">
+        <p14:section name="Pembuka" id="{1c1ac9c2-5eb8-efee-c08e-21691f744ba6}">
           <p14:sldIdLst>
             <p14:sldId id="256"/>
             <p14:sldId id="257"/>
             <p14:sldId id="258"/>
           </p14:sldIdLst>
         </p14:section>
-        <p14:section name="Konsep" id="{1e2dea8f-8589-e207-edb7-00c0afe1f368}">
+        <p14:section name="Konsep" id="{bc6be1c6-5e7c-abfa-68c5-4da01b954eb4}">
           <p14:sldIdLst>
             <p14:sldId id="259"/>
             <p14:sldId id="260"/>
             <p14:sldId id="261"/>
           </p14:sldIdLst>
         </p14:section>
-        <p14:section name="Datasheet" id="{d1557ac3-278a-3998-cab4-ced3325e8d51}">
+        <p14:section name="Datasheet" id="{ec67c189-5255-3df9-263b-8f639f946c49}">
           <p14:sldIdLst>
             <p14:sldId id="262"/>
             <p14:sldId id="263"/>
@@ -157,7 +157,7 @@
             <p14:sldId id="269"/>
           </p14:sldIdLst>
         </p14:section>
-        <p14:section name="Library" id="{7f6954cf-3f3f-a015-641b-83a1c0c28a03}">
+        <p14:section name="Library" id="{c0a52ae8-07f9-c39a-396c-0531f486b671}">
           <p14:sldIdLst>
             <p14:sldId id="270"/>
             <p14:sldId id="271"/>
@@ -170,7 +170,7 @@
             <p14:sldId id="278"/>
           </p14:sldIdLst>
         </p14:section>
-        <p14:section name="Penutup" id="{5c3127ba-a46d-1e53-9e93-f80e79032b6a}">
+        <p14:section name="Penutup" id="{f3c94592-0f0b-2c39-f021-33ee891ec2a7}">
           <p14:sldIdLst>
             <p14:sldId id="279"/>
             <p14:sldId id="280"/>
@@ -15787,12 +15787,20 @@
               <a:buNone/>
             </a:pPr>
             <a:r>
+              <a:rPr lang="en-US" sz="2000" dirty="0">
+                <a:solidFill>
+                  <a:schemeClr val="bg1"/>
+                </a:solidFill>
+              </a:rPr>
+              <a:t>Pasang </a:t>
+            </a:r>
+            <a:r>
               <a:rPr lang="en-US" sz="2000" i="1" dirty="0">
                 <a:solidFill>
                   <a:schemeClr val="bg1"/>
                 </a:solidFill>
               </a:rPr>
-              <a:t>Library</a:t>
+              <a:t>library</a:t>
             </a:r>
             <a:r>
               <a:rPr lang="en-US" sz="2000" dirty="0">
@@ -15800,7 +15808,7 @@
                   <a:schemeClr val="bg1"/>
                 </a:solidFill>
               </a:rPr>
-              <a:t>: </a:t>
+              <a:t> lewat </a:t>
             </a:r>
             <a:r>
               <a:rPr lang="en-US" sz="2000" dirty="0">
@@ -15819,7 +15827,7 @@
                   <a:schemeClr val="bg1"/>
                 </a:solidFill>
               </a:rPr>
-              <a:t>/</a:t>
+              <a:t> (PlatformIO) atau </a:t>
             </a:r>
             <a:r>
               <a:rPr lang="en-US" sz="2000" dirty="0">
@@ -15838,26 +15846,7 @@
                   <a:schemeClr val="bg1"/>
                 </a:solidFill>
               </a:rPr>
-              <a:t>, versi </a:t>
-            </a:r>
-            <a:r>
-              <a:rPr lang="en-US" sz="2000" dirty="0">
-                <a:solidFill>
-                  <a:srgbClr val="F2C98A"/>
-                </a:solidFill>
-                <a:latin typeface="Consolas" pitchFamily="34" charset="0"/>
-                <a:ea typeface="Consolas" pitchFamily="34" charset="-122"/>
-                <a:cs typeface="Consolas" pitchFamily="34" charset="-120"/>
-              </a:rPr>
-              <a:t>^</a:t>
-            </a:r>
-            <a:r>
-              <a:rPr lang="en-US" sz="2000" dirty="0">
-                <a:solidFill>
-                  <a:schemeClr val="bg1"/>
-                </a:solidFill>
-              </a:rPr>
-              <a:t>, cek lisensi</a:t>
+              <a:t> (Wokwi); perhatikan versi dan lisensinya</a:t>
             </a:r>
             <a:endParaRPr lang="en-US" sz="2000" dirty="0"/>
           </a:p>
